--- a/MLDL_Project/Shirmila_MLDL_Project Vshared.pptx
+++ b/MLDL_Project/Shirmila_MLDL_Project Vshared.pptx
@@ -227,7 +227,7 @@
           <a:p>
             <a:fld id="{218EF07C-512F-47B2-AA3D-17C795D43972}" type="datetimeFigureOut">
               <a:rPr lang="en-CA" smtClean="0"/>
-              <a:t>2025-03-14</a:t>
+              <a:t>2025-09-17</a:t>
             </a:fld>
             <a:endParaRPr lang="en-CA"/>
           </a:p>
@@ -1310,7 +1310,7 @@
           <a:p>
             <a:fld id="{D69F77DD-C69D-44F9-80E9-D8E458541C1B}" type="datetimeFigureOut">
               <a:rPr lang="en-CA" smtClean="0"/>
-              <a:t>2025-03-14</a:t>
+              <a:t>2025-09-17</a:t>
             </a:fld>
             <a:endParaRPr lang="en-CA"/>
           </a:p>
@@ -1510,7 +1510,7 @@
           <a:p>
             <a:fld id="{D69F77DD-C69D-44F9-80E9-D8E458541C1B}" type="datetimeFigureOut">
               <a:rPr lang="en-CA" smtClean="0"/>
-              <a:t>2025-03-14</a:t>
+              <a:t>2025-09-17</a:t>
             </a:fld>
             <a:endParaRPr lang="en-CA"/>
           </a:p>
@@ -1720,7 +1720,7 @@
           <a:p>
             <a:fld id="{D69F77DD-C69D-44F9-80E9-D8E458541C1B}" type="datetimeFigureOut">
               <a:rPr lang="en-CA" smtClean="0"/>
-              <a:t>2025-03-14</a:t>
+              <a:t>2025-09-17</a:t>
             </a:fld>
             <a:endParaRPr lang="en-CA"/>
           </a:p>
@@ -1920,7 +1920,7 @@
           <a:p>
             <a:fld id="{D69F77DD-C69D-44F9-80E9-D8E458541C1B}" type="datetimeFigureOut">
               <a:rPr lang="en-CA" smtClean="0"/>
-              <a:t>2025-03-14</a:t>
+              <a:t>2025-09-17</a:t>
             </a:fld>
             <a:endParaRPr lang="en-CA"/>
           </a:p>
@@ -2196,7 +2196,7 @@
           <a:p>
             <a:fld id="{D69F77DD-C69D-44F9-80E9-D8E458541C1B}" type="datetimeFigureOut">
               <a:rPr lang="en-CA" smtClean="0"/>
-              <a:t>2025-03-14</a:t>
+              <a:t>2025-09-17</a:t>
             </a:fld>
             <a:endParaRPr lang="en-CA"/>
           </a:p>
@@ -2464,7 +2464,7 @@
           <a:p>
             <a:fld id="{D69F77DD-C69D-44F9-80E9-D8E458541C1B}" type="datetimeFigureOut">
               <a:rPr lang="en-CA" smtClean="0"/>
-              <a:t>2025-03-14</a:t>
+              <a:t>2025-09-17</a:t>
             </a:fld>
             <a:endParaRPr lang="en-CA"/>
           </a:p>
@@ -2879,7 +2879,7 @@
           <a:p>
             <a:fld id="{D69F77DD-C69D-44F9-80E9-D8E458541C1B}" type="datetimeFigureOut">
               <a:rPr lang="en-CA" smtClean="0"/>
-              <a:t>2025-03-14</a:t>
+              <a:t>2025-09-17</a:t>
             </a:fld>
             <a:endParaRPr lang="en-CA"/>
           </a:p>
@@ -3021,7 +3021,7 @@
           <a:p>
             <a:fld id="{D69F77DD-C69D-44F9-80E9-D8E458541C1B}" type="datetimeFigureOut">
               <a:rPr lang="en-CA" smtClean="0"/>
-              <a:t>2025-03-14</a:t>
+              <a:t>2025-09-17</a:t>
             </a:fld>
             <a:endParaRPr lang="en-CA"/>
           </a:p>
@@ -3134,7 +3134,7 @@
           <a:p>
             <a:fld id="{D69F77DD-C69D-44F9-80E9-D8E458541C1B}" type="datetimeFigureOut">
               <a:rPr lang="en-CA" smtClean="0"/>
-              <a:t>2025-03-14</a:t>
+              <a:t>2025-09-17</a:t>
             </a:fld>
             <a:endParaRPr lang="en-CA"/>
           </a:p>
@@ -3447,7 +3447,7 @@
           <a:p>
             <a:fld id="{D69F77DD-C69D-44F9-80E9-D8E458541C1B}" type="datetimeFigureOut">
               <a:rPr lang="en-CA" smtClean="0"/>
-              <a:t>2025-03-14</a:t>
+              <a:t>2025-09-17</a:t>
             </a:fld>
             <a:endParaRPr lang="en-CA"/>
           </a:p>
@@ -3736,7 +3736,7 @@
           <a:p>
             <a:fld id="{D69F77DD-C69D-44F9-80E9-D8E458541C1B}" type="datetimeFigureOut">
               <a:rPr lang="en-CA" smtClean="0"/>
-              <a:t>2025-03-14</a:t>
+              <a:t>2025-09-17</a:t>
             </a:fld>
             <a:endParaRPr lang="en-CA"/>
           </a:p>
@@ -3979,7 +3979,7 @@
           <a:p>
             <a:fld id="{D69F77DD-C69D-44F9-80E9-D8E458541C1B}" type="datetimeFigureOut">
               <a:rPr lang="en-CA" smtClean="0"/>
-              <a:t>2025-03-14</a:t>
+              <a:t>2025-09-17</a:t>
             </a:fld>
             <a:endParaRPr lang="en-CA"/>
           </a:p>
